--- a/courses/build/farmer-5day/F-D3.zu.pptx
+++ b/courses/build/farmer-5day/F-D3.zu.pptx
@@ -686,7 +686,7 @@
           </a:p>
           <a:p>
             <a:r>
-              <a:t>Clip F-ANI-16: public/course-animations/soil-health/watch-10-compost-heap.mp4</a:t>
+              <a:t>Clip F-ANI-16: public/course-animations/soil-health/flow-build-compost-heap.mp4</a:t>
             </a:r>
           </a:p>
         </p:txBody>
@@ -1279,7 +1279,7 @@
           </a:p>
           <a:p>
             <a:r>
-              <a:t>Clip F-ANI-13: public/course-animations/soil-health/watch-05-living-soil.mp4</a:t>
+              <a:t>Clip F-ANI-13: public/course-media/farmer-5day/F-ANI-13.mp4</a:t>
             </a:r>
           </a:p>
         </p:txBody>
@@ -1436,7 +1436,7 @@
           </a:p>
           <a:p>
             <a:r>
-              <a:t>Clip F-ANI-14: public/course-animations/soil-health/tour-soil-observation.mp4</a:t>
+              <a:t>Clip F-ANI-14: public/course-media/farmer-5day/F-ANI-14.mp4</a:t>
             </a:r>
           </a:p>
         </p:txBody>
@@ -5824,7 +5824,7 @@
       </p:sp>
       <p:pic>
         <p:nvPicPr>
-          <p:cNvPr id="7" name="Picture 6" descr="watch-10-compost-heap.jpg"/>
+          <p:cNvPr id="7" name="Picture 6" descr="flow-build-compost-heap.jpg"/>
           <p:cNvPicPr>
             <a:picLocks noChangeAspect="1"/>
           </p:cNvPicPr>
@@ -5924,7 +5924,7 @@
                 </a:solidFill>
                 <a:latin typeface="Verdana"/>
               </a:rPr>
-              <a:t>▶  Clip F-ANI-16 · play from the tablet: watch-10-compost-heap.mp4</a:t>
+              <a:t>▶  Clip F-ANI-16 · play from the tablet: flow-build-compost-heap.mp4</a:t>
             </a:r>
           </a:p>
         </p:txBody>
@@ -9418,49 +9418,27 @@
           </a:p>
         </p:txBody>
       </p:sp>
-      <p:pic>
-        <p:nvPicPr>
-          <p:cNvPr id="7" name="Picture 6" descr="watch-05-living-soil.jpg"/>
-          <p:cNvPicPr>
-            <a:picLocks noChangeAspect="1"/>
-          </p:cNvPicPr>
-          <p:nvPr/>
-        </p:nvPicPr>
-        <p:blipFill>
-          <a:blip r:embed="rId2"/>
-          <a:stretch>
-            <a:fillRect/>
-          </a:stretch>
-        </p:blipFill>
-        <p:spPr>
-          <a:xfrm>
-            <a:off x="5852160" y="2308860"/>
-            <a:ext cx="5852160" cy="3291840"/>
-          </a:xfrm>
-          <a:prstGeom prst="rect">
-            <a:avLst/>
-          </a:prstGeom>
-        </p:spPr>
-      </p:pic>
-      <p:sp>
-        <p:nvSpPr>
-          <p:cNvPr id="8" name="Rectangle 7"/>
+      <p:sp>
+        <p:nvSpPr>
+          <p:cNvPr id="7" name="Rectangle 6"/>
           <p:cNvSpPr/>
           <p:nvPr/>
         </p:nvSpPr>
         <p:spPr>
           <a:xfrm>
-            <a:off x="5852160" y="5806440"/>
-            <a:ext cx="5852160" cy="411480"/>
+            <a:off x="5852160" y="1691640"/>
+            <a:ext cx="5852160" cy="4526280"/>
           </a:xfrm>
           <a:prstGeom prst="rect">
             <a:avLst/>
           </a:prstGeom>
           <a:solidFill>
-            <a:srgbClr val="1B1A17"/>
+            <a:srgbClr val="EFE6D2"/>
           </a:solidFill>
-          <a:ln>
-            <a:noFill/>
+          <a:ln w="15875">
+            <a:solidFill>
+              <a:srgbClr val="2F5D34"/>
+            </a:solidFill>
           </a:ln>
           <a:effectLst/>
         </p:spPr>
@@ -9488,14 +9466,53 @@
       </p:sp>
       <p:sp>
         <p:nvSpPr>
+          <p:cNvPr id="8" name="TextBox 7"/>
+          <p:cNvSpPr txBox="1"/>
+          <p:nvPr/>
+        </p:nvSpPr>
+        <p:spPr>
+          <a:xfrm>
+            <a:off x="6080760" y="1874520"/>
+            <a:ext cx="5394960" cy="365760"/>
+          </a:xfrm>
+          <a:prstGeom prst="rect">
+            <a:avLst/>
+          </a:prstGeom>
+          <a:noFill/>
+        </p:spPr>
+        <p:txBody>
+          <a:bodyPr wrap="square" anchor="t" lIns="45720" rIns="45720">
+            <a:spAutoFit/>
+          </a:bodyPr>
+          <a:lstStyle/>
+          <a:p>
+            <a:pPr algn="l">
+              <a:spcAft>
+                <a:spcPts val="800"/>
+              </a:spcAft>
+            </a:pPr>
+            <a:r>
+              <a:rPr sz="1200" b="1">
+                <a:solidFill>
+                  <a:srgbClr val="B24E2A"/>
+                </a:solidFill>
+                <a:latin typeface="Verdana"/>
+              </a:rPr>
+              <a:t>ANIMATION · F-ANI-13 · coming</a:t>
+            </a:r>
+          </a:p>
+        </p:txBody>
+      </p:sp>
+      <p:sp>
+        <p:nvSpPr>
           <p:cNvPr id="9" name="TextBox 8"/>
           <p:cNvSpPr txBox="1"/>
           <p:nvPr/>
         </p:nvSpPr>
         <p:spPr>
           <a:xfrm>
-            <a:off x="5943600" y="5815584"/>
-            <a:ext cx="5669280" cy="384048"/>
+            <a:off x="6080760" y="2258568"/>
+            <a:ext cx="5394960" cy="457200"/>
           </a:xfrm>
           <a:prstGeom prst="rect">
             <a:avLst/>
@@ -9503,7 +9520,7 @@
           <a:noFill/>
         </p:spPr>
         <p:txBody>
-          <a:bodyPr wrap="square" anchor="ctr" lIns="45720" rIns="45720">
+          <a:bodyPr wrap="square" anchor="t" lIns="45720" rIns="45720">
             <a:spAutoFit/>
           </a:bodyPr>
           <a:lstStyle/>
@@ -9514,13 +9531,52 @@
               </a:spcAft>
             </a:pPr>
             <a:r>
+              <a:rPr sz="1800" b="1">
+                <a:solidFill>
+                  <a:srgbClr val="1B1A17"/>
+                </a:solidFill>
+                <a:latin typeface="Rockwell"/>
+              </a:rPr>
+              <a:t>Living soil</a:t>
+            </a:r>
+          </a:p>
+        </p:txBody>
+      </p:sp>
+      <p:sp>
+        <p:nvSpPr>
+          <p:cNvPr id="10" name="TextBox 9"/>
+          <p:cNvSpPr txBox="1"/>
+          <p:nvPr/>
+        </p:nvSpPr>
+        <p:spPr>
+          <a:xfrm>
+            <a:off x="6080760" y="2788920"/>
+            <a:ext cx="5394960" cy="3246120"/>
+          </a:xfrm>
+          <a:prstGeom prst="rect">
+            <a:avLst/>
+          </a:prstGeom>
+          <a:noFill/>
+        </p:spPr>
+        <p:txBody>
+          <a:bodyPr wrap="square" anchor="t" lIns="45720" rIns="45720">
+            <a:spAutoFit/>
+          </a:bodyPr>
+          <a:lstStyle/>
+          <a:p>
+            <a:pPr algn="l">
+              <a:spcAft>
+                <a:spcPts val="800"/>
+              </a:spcAft>
+            </a:pPr>
+            <a:r>
               <a:rPr sz="1100" b="0">
                 <a:solidFill>
-                  <a:srgbClr val="EFE6D2"/>
+                  <a:srgbClr val="1B1A17"/>
                 </a:solidFill>
                 <a:latin typeface="Verdana"/>
               </a:rPr>
-              <a:t>▶  Clip F-ANI-13 · play from the tablet: watch-05-living-soil.mp4</a:t>
+              <a:t>Cut-away of dark garden soil under mulch, magnified: earthworms tunnel, fungus threads link roots, tiny specks of life move, crumbs hold air and water droplets; a fallen leaf above is slowly broken down and pulled into the soil. (Replaces the withdrawn clip `soil-health/watch-05-living-soil.mp4`.)</a:t>
             </a:r>
           </a:p>
         </p:txBody>
@@ -10255,49 +10311,27 @@
           </a:p>
         </p:txBody>
       </p:sp>
-      <p:pic>
-        <p:nvPicPr>
-          <p:cNvPr id="9" name="Picture 8" descr="tour-soil-observation.jpg"/>
-          <p:cNvPicPr>
-            <a:picLocks noChangeAspect="1"/>
-          </p:cNvPicPr>
-          <p:nvPr/>
-        </p:nvPicPr>
-        <p:blipFill>
-          <a:blip r:embed="rId2"/>
-          <a:stretch>
-            <a:fillRect/>
-          </a:stretch>
-        </p:blipFill>
-        <p:spPr>
-          <a:xfrm>
-            <a:off x="5852160" y="2148840"/>
-            <a:ext cx="5852160" cy="4023360"/>
-          </a:xfrm>
-          <a:prstGeom prst="rect">
-            <a:avLst/>
-          </a:prstGeom>
-        </p:spPr>
-      </p:pic>
-      <p:sp>
-        <p:nvSpPr>
-          <p:cNvPr id="10" name="Rectangle 9"/>
+      <p:sp>
+        <p:nvSpPr>
+          <p:cNvPr id="9" name="Rectangle 8"/>
           <p:cNvSpPr/>
           <p:nvPr/>
         </p:nvSpPr>
         <p:spPr>
           <a:xfrm>
-            <a:off x="5852160" y="5806440"/>
-            <a:ext cx="5852160" cy="411480"/>
+            <a:off x="5852160" y="2103120"/>
+            <a:ext cx="5852160" cy="4114800"/>
           </a:xfrm>
           <a:prstGeom prst="rect">
             <a:avLst/>
           </a:prstGeom>
           <a:solidFill>
-            <a:srgbClr val="1B1A17"/>
+            <a:srgbClr val="EFE6D2"/>
           </a:solidFill>
-          <a:ln>
-            <a:noFill/>
+          <a:ln w="15875">
+            <a:solidFill>
+              <a:srgbClr val="2F5D34"/>
+            </a:solidFill>
           </a:ln>
           <a:effectLst/>
         </p:spPr>
@@ -10325,14 +10359,53 @@
       </p:sp>
       <p:sp>
         <p:nvSpPr>
+          <p:cNvPr id="10" name="TextBox 9"/>
+          <p:cNvSpPr txBox="1"/>
+          <p:nvPr/>
+        </p:nvSpPr>
+        <p:spPr>
+          <a:xfrm>
+            <a:off x="6080760" y="2286000"/>
+            <a:ext cx="5394960" cy="365760"/>
+          </a:xfrm>
+          <a:prstGeom prst="rect">
+            <a:avLst/>
+          </a:prstGeom>
+          <a:noFill/>
+        </p:spPr>
+        <p:txBody>
+          <a:bodyPr wrap="square" anchor="t" lIns="45720" rIns="45720">
+            <a:spAutoFit/>
+          </a:bodyPr>
+          <a:lstStyle/>
+          <a:p>
+            <a:pPr algn="l">
+              <a:spcAft>
+                <a:spcPts val="800"/>
+              </a:spcAft>
+            </a:pPr>
+            <a:r>
+              <a:rPr sz="1200" b="1">
+                <a:solidFill>
+                  <a:srgbClr val="B24E2A"/>
+                </a:solidFill>
+                <a:latin typeface="Verdana"/>
+              </a:rPr>
+              <a:t>ANIMATION · F-ANI-14 · coming</a:t>
+            </a:r>
+          </a:p>
+        </p:txBody>
+      </p:sp>
+      <p:sp>
+        <p:nvSpPr>
           <p:cNvPr id="11" name="TextBox 10"/>
           <p:cNvSpPr txBox="1"/>
           <p:nvPr/>
         </p:nvSpPr>
         <p:spPr>
           <a:xfrm>
-            <a:off x="5943600" y="5815584"/>
-            <a:ext cx="5669280" cy="384048"/>
+            <a:off x="6080760" y="2670048"/>
+            <a:ext cx="5394960" cy="457200"/>
           </a:xfrm>
           <a:prstGeom prst="rect">
             <a:avLst/>
@@ -10340,7 +10413,7 @@
           <a:noFill/>
         </p:spPr>
         <p:txBody>
-          <a:bodyPr wrap="square" anchor="ctr" lIns="45720" rIns="45720">
+          <a:bodyPr wrap="square" anchor="t" lIns="45720" rIns="45720">
             <a:spAutoFit/>
           </a:bodyPr>
           <a:lstStyle/>
@@ -10351,13 +10424,52 @@
               </a:spcAft>
             </a:pPr>
             <a:r>
+              <a:rPr sz="1800" b="1">
+                <a:solidFill>
+                  <a:srgbClr val="1B1A17"/>
+                </a:solidFill>
+                <a:latin typeface="Rockwell"/>
+              </a:rPr>
+              <a:t>Soil observation</a:t>
+            </a:r>
+          </a:p>
+        </p:txBody>
+      </p:sp>
+      <p:sp>
+        <p:nvSpPr>
+          <p:cNvPr id="12" name="TextBox 11"/>
+          <p:cNvSpPr txBox="1"/>
+          <p:nvPr/>
+        </p:nvSpPr>
+        <p:spPr>
+          <a:xfrm>
+            <a:off x="6080760" y="3200400"/>
+            <a:ext cx="5394960" cy="2834640"/>
+          </a:xfrm>
+          <a:prstGeom prst="rect">
+            <a:avLst/>
+          </a:prstGeom>
+          <a:noFill/>
+        </p:spPr>
+        <p:txBody>
+          <a:bodyPr wrap="square" anchor="t" lIns="45720" rIns="45720">
+            <a:spAutoFit/>
+          </a:bodyPr>
+          <a:lstStyle/>
+          <a:p>
+            <a:pPr algn="l">
+              <a:spcAft>
+                <a:spcPts val="800"/>
+              </a:spcAft>
+            </a:pPr>
+            <a:r>
               <a:rPr sz="1100" b="0">
                 <a:solidFill>
-                  <a:srgbClr val="EFE6D2"/>
+                  <a:srgbClr val="1B1A17"/>
                 </a:solidFill>
                 <a:latin typeface="Verdana"/>
               </a:rPr>
-              <a:t>▶  Clip F-ANI-14 · play from the tablet: tour-soil-observation.mp4</a:t>
+              <a:t>Hands dig a spade-deep square of garden soil, lift it and crumble it: dark crumbs, fine roots, an earthworm, fungus threads. Beside it a pale hard lump from a path cracks apart with nothing living in it. Slow side-by-side comparison. (Replaces the withdrawn clip `soil-health/tour-soil-observation.mp4`.)</a:t>
             </a:r>
           </a:p>
         </p:txBody>
